--- a/Modul Minna 1/Bab 13/38. Minna 1 Tata Bahasa Bab 13 - Slide.pptx
+++ b/Modul Minna 1/Bab 13/38. Minna 1 Tata Bahasa Bab 13 - Slide.pptx
@@ -3402,7 +3402,7 @@
                 <a:ea typeface="Arial" pitchFamily="34" charset="-122"/>
                 <a:cs typeface="Arial" pitchFamily="34" charset="-120"/>
               </a:rPr>
-              <a:t>こうべへえいがをみにいきます。</a:t>
+              <a:t>マランへえいがをみにいきます。</a:t>
             </a:r>
             <a:endParaRPr lang="en-US" sz="1700" dirty="0"/>
           </a:p>
@@ -3441,7 +3441,7 @@
                 <a:ea typeface="Arial" pitchFamily="34" charset="-122"/>
                 <a:cs typeface="Arial" pitchFamily="34" charset="-120"/>
               </a:rPr>
-              <a:t>Koube e eiga o mi ni ikimasu</a:t>
+              <a:t>Maran e eiga o mi ni ikimasu</a:t>
             </a:r>
             <a:pPr indent="0" marL="0">
               <a:buNone/>
@@ -3469,7 +3469,7 @@
                 <a:ea typeface="Arial" pitchFamily="34" charset="-122"/>
                 <a:cs typeface="Arial" pitchFamily="34" charset="-120"/>
               </a:rPr>
-              <a:t>Pergi ke Kobe untuk nonton film.</a:t>
+              <a:t>Pergi ke Malang untuk nonton film.</a:t>
             </a:r>
             <a:endParaRPr lang="en-US" sz="950" dirty="0"/>
           </a:p>
